--- a/dv-lec1-intro.pptx
+++ b/dv-lec1-intro.pptx
@@ -5,7 +5,7 @@
     <p:sldMasterId id="2147483648" r:id="rId1"/>
   </p:sldMasterIdLst>
   <p:notesMasterIdLst>
-    <p:notesMasterId r:id="rId43"/>
+    <p:notesMasterId r:id="rId44"/>
   </p:notesMasterIdLst>
   <p:sldIdLst>
     <p:sldId id="296" r:id="rId2"/>
@@ -40,15 +40,16 @@
     <p:sldId id="282" r:id="rId31"/>
     <p:sldId id="283" r:id="rId32"/>
     <p:sldId id="284" r:id="rId33"/>
-    <p:sldId id="285" r:id="rId34"/>
-    <p:sldId id="286" r:id="rId35"/>
-    <p:sldId id="287" r:id="rId36"/>
-    <p:sldId id="288" r:id="rId37"/>
-    <p:sldId id="289" r:id="rId38"/>
-    <p:sldId id="290" r:id="rId39"/>
-    <p:sldId id="292" r:id="rId40"/>
-    <p:sldId id="295" r:id="rId41"/>
-    <p:sldId id="293" r:id="rId42"/>
+    <p:sldId id="300" r:id="rId34"/>
+    <p:sldId id="285" r:id="rId35"/>
+    <p:sldId id="286" r:id="rId36"/>
+    <p:sldId id="287" r:id="rId37"/>
+    <p:sldId id="288" r:id="rId38"/>
+    <p:sldId id="289" r:id="rId39"/>
+    <p:sldId id="290" r:id="rId40"/>
+    <p:sldId id="292" r:id="rId41"/>
+    <p:sldId id="295" r:id="rId42"/>
+    <p:sldId id="293" r:id="rId43"/>
   </p:sldIdLst>
   <p:sldSz cx="9144000" cy="6858000" type="screen4x3"/>
   <p:notesSz cx="6858000" cy="9144000"/>
@@ -1955,8 +1956,8 @@
         </p:nvSpPr>
         <p:spPr>
           <a:xfrm>
-            <a:off x="1143225" y="685800"/>
-            <a:ext cx="4572225" cy="3429000"/>
+            <a:off x="1143000" y="685800"/>
+            <a:ext cx="4572000" cy="3429000"/>
           </a:xfrm>
           <a:custGeom>
             <a:avLst/>
@@ -2475,8 +2476,8 @@
         </p:nvSpPr>
         <p:spPr>
           <a:xfrm>
-            <a:off x="1143225" y="685800"/>
-            <a:ext cx="4572225" cy="3429000"/>
+            <a:off x="1143000" y="685800"/>
+            <a:ext cx="4572000" cy="3429000"/>
           </a:xfrm>
           <a:custGeom>
             <a:avLst/>
@@ -2579,8 +2580,8 @@
         </p:nvSpPr>
         <p:spPr>
           <a:xfrm>
-            <a:off x="1143225" y="685800"/>
-            <a:ext cx="4572225" cy="3429000"/>
+            <a:off x="1143000" y="685800"/>
+            <a:ext cx="4572000" cy="3429000"/>
           </a:xfrm>
           <a:custGeom>
             <a:avLst/>
@@ -3515,8 +3516,8 @@
         </p:nvSpPr>
         <p:spPr>
           <a:xfrm>
-            <a:off x="1143225" y="685800"/>
-            <a:ext cx="4572225" cy="3429000"/>
+            <a:off x="1143000" y="685800"/>
+            <a:ext cx="4572000" cy="3429000"/>
           </a:xfrm>
           <a:custGeom>
             <a:avLst/>
@@ -4347,8 +4348,8 @@
         </p:nvSpPr>
         <p:spPr>
           <a:xfrm>
-            <a:off x="1143225" y="685800"/>
-            <a:ext cx="4572225" cy="3429000"/>
+            <a:off x="1143000" y="685800"/>
+            <a:ext cx="4572000" cy="3429000"/>
           </a:xfrm>
           <a:custGeom>
             <a:avLst/>
@@ -15158,7 +15159,7 @@
         </p:spPr>
         <p:txBody>
           <a:bodyPr spcFirstLastPara="1" wrap="square" lIns="91425" tIns="45700" rIns="91425" bIns="45700" anchor="ctr" anchorCtr="0">
-            <a:normAutofit fontScale="90000"/>
+            <a:normAutofit/>
           </a:bodyPr>
           <a:lstStyle/>
           <a:p>
@@ -15177,17 +15178,22 @@
               <a:buNone/>
             </a:pPr>
             <a:r>
-              <a:rPr lang="ru-RU"/>
-              <a:t>Column Chart </a:t>
+              <a:rPr lang="ru-RU" dirty="0" err="1"/>
+              <a:t>Column</a:t>
             </a:r>
-            <a:br>
-              <a:rPr lang="ru-RU"/>
-            </a:br>
             <a:r>
-              <a:rPr lang="ru-RU"/>
-              <a:t>(Column Chart)</a:t>
+              <a:rPr lang="ru-RU" dirty="0"/>
+              <a:t> </a:t>
             </a:r>
-            <a:endParaRPr/>
+            <a:r>
+              <a:rPr lang="ru-RU" dirty="0" err="1"/>
+              <a:t>Chart</a:t>
+            </a:r>
+            <a:r>
+              <a:rPr lang="ru-RU" dirty="0"/>
+              <a:t> </a:t>
+            </a:r>
+            <a:endParaRPr dirty="0"/>
           </a:p>
         </p:txBody>
       </p:sp>
@@ -15364,10 +15370,18 @@
               <a:buNone/>
             </a:pPr>
             <a:r>
-              <a:rPr lang="ru-RU"/>
-              <a:t>Bar Histograms (Bar Histograms)</a:t>
+              <a:rPr lang="ru-RU" dirty="0" err="1"/>
+              <a:t>Bar</a:t>
             </a:r>
-            <a:endParaRPr/>
+            <a:r>
+              <a:rPr lang="ru-RU" dirty="0"/>
+              <a:t> </a:t>
+            </a:r>
+            <a:r>
+              <a:rPr lang="ru-RU" dirty="0" err="1"/>
+              <a:t>Histograms</a:t>
+            </a:r>
+            <a:endParaRPr dirty="0"/>
           </a:p>
         </p:txBody>
       </p:sp>
@@ -15486,7 +15500,7 @@
         <p:spPr>
           <a:xfrm>
             <a:off x="457200" y="274638"/>
-            <a:ext cx="8229600" cy="1143000"/>
+            <a:ext cx="8229600" cy="1113004"/>
           </a:xfrm>
           <a:prstGeom prst="rect">
             <a:avLst/>
@@ -15498,7 +15512,7 @@
         </p:spPr>
         <p:txBody>
           <a:bodyPr spcFirstLastPara="1" wrap="square" lIns="91425" tIns="45700" rIns="91425" bIns="45700" anchor="ctr" anchorCtr="0">
-            <a:normAutofit fontScale="90000"/>
+            <a:normAutofit/>
           </a:bodyPr>
           <a:lstStyle/>
           <a:p>
@@ -15517,17 +15531,38 @@
               <a:buNone/>
             </a:pPr>
             <a:r>
-              <a:rPr lang="ru-RU"/>
-              <a:t>Bar chart vs.</a:t>
+              <a:rPr lang="ru-RU" dirty="0" err="1"/>
+              <a:t>Bar</a:t>
             </a:r>
-            <a:br>
-              <a:rPr lang="ru-RU"/>
-            </a:br>
             <a:r>
-              <a:rPr lang="ru-RU"/>
-              <a:t>Bar chart</a:t>
+              <a:rPr lang="ru-RU" dirty="0"/>
+              <a:t> </a:t>
             </a:r>
-            <a:endParaRPr/>
+            <a:r>
+              <a:rPr lang="en-US" dirty="0"/>
+              <a:t>C</a:t>
+            </a:r>
+            <a:r>
+              <a:rPr lang="ru-RU" dirty="0" err="1"/>
+              <a:t>hart</a:t>
+            </a:r>
+            <a:r>
+              <a:rPr lang="ru-RU" dirty="0"/>
+              <a:t> </a:t>
+            </a:r>
+            <a:r>
+              <a:rPr lang="ru-RU" dirty="0" err="1"/>
+              <a:t>vs</a:t>
+            </a:r>
+            <a:r>
+              <a:rPr lang="ru-RU" dirty="0"/>
+              <a:t>.</a:t>
+            </a:r>
+            <a:r>
+              <a:rPr lang="en-US" dirty="0"/>
+              <a:t> Histogram</a:t>
+            </a:r>
+            <a:endParaRPr dirty="0"/>
           </a:p>
         </p:txBody>
       </p:sp>
@@ -15803,13 +15838,13 @@
           <a:blip r:embed="rId3">
             <a:alphaModFix/>
           </a:blip>
-          <a:srcRect r="33344"/>
+          <a:srcRect t="8846" r="33344"/>
           <a:stretch/>
         </p:blipFill>
         <p:spPr>
           <a:xfrm>
-            <a:off x="827584" y="4215431"/>
-            <a:ext cx="3816426" cy="2308103"/>
+            <a:off x="827584" y="4419600"/>
+            <a:ext cx="3816426" cy="2103934"/>
           </a:xfrm>
           <a:prstGeom prst="rect">
             <a:avLst/>
@@ -16214,9 +16249,16 @@
             <p:ph type="title"/>
           </p:nvPr>
         </p:nvSpPr>
-        <p:spPr/>
+        <p:spPr>
+          <a:xfrm>
+            <a:off x="457200" y="274638"/>
+            <a:ext cx="8229600" cy="732289"/>
+          </a:xfrm>
+        </p:spPr>
         <p:txBody>
-          <a:bodyPr/>
+          <a:bodyPr>
+            <a:normAutofit fontScale="90000"/>
+          </a:bodyPr>
           <a:lstStyle/>
           <a:p>
             <a:r>
@@ -16659,7 +16701,7 @@
         <p:spPr>
           <a:xfrm>
             <a:off x="457200" y="274638"/>
-            <a:ext cx="8229600" cy="1143000"/>
+            <a:ext cx="8229600" cy="583615"/>
           </a:xfrm>
           <a:prstGeom prst="rect">
             <a:avLst/>
@@ -16671,7 +16713,7 @@
         </p:spPr>
         <p:txBody>
           <a:bodyPr spcFirstLastPara="1" wrap="square" lIns="91425" tIns="45700" rIns="91425" bIns="45700" anchor="ctr" anchorCtr="0">
-            <a:normAutofit/>
+            <a:normAutofit fontScale="90000"/>
           </a:bodyPr>
           <a:lstStyle/>
           <a:p>
@@ -16690,10 +16732,14 @@
               <a:buNone/>
             </a:pPr>
             <a:r>
-              <a:rPr lang="ru-RU"/>
-              <a:t>Stream Graph (Stream Graph)</a:t>
+              <a:rPr lang="ru-RU" dirty="0"/>
+              <a:t>Stream </a:t>
             </a:r>
-            <a:endParaRPr/>
+            <a:r>
+              <a:rPr lang="ru-RU" dirty="0" err="1"/>
+              <a:t>Graph</a:t>
+            </a:r>
+            <a:endParaRPr dirty="0"/>
           </a:p>
         </p:txBody>
       </p:sp>
@@ -17070,10 +17116,18 @@
               <a:buNone/>
             </a:pPr>
             <a:r>
-              <a:rPr lang="ru-RU"/>
-              <a:t>Bubble Charts (Bubble Charts)</a:t>
+              <a:rPr lang="ru-RU" dirty="0" err="1"/>
+              <a:t>Bubble</a:t>
             </a:r>
-            <a:endParaRPr/>
+            <a:r>
+              <a:rPr lang="ru-RU" dirty="0"/>
+              <a:t> </a:t>
+            </a:r>
+            <a:r>
+              <a:rPr lang="ru-RU" dirty="0" err="1"/>
+              <a:t>Charts</a:t>
+            </a:r>
+            <a:endParaRPr dirty="0"/>
           </a:p>
         </p:txBody>
       </p:sp>
@@ -18216,10 +18270,22 @@
               <a:buNone/>
             </a:pPr>
             <a:r>
-              <a:rPr lang="ru-RU"/>
-              <a:t>Heat map (heat map)</a:t>
+              <a:rPr lang="ru-RU" dirty="0" err="1"/>
+              <a:t>Heat</a:t>
             </a:r>
-            <a:endParaRPr/>
+            <a:r>
+              <a:rPr lang="ru-RU" dirty="0"/>
+              <a:t> </a:t>
+            </a:r>
+            <a:r>
+              <a:rPr lang="ru-RU" dirty="0" err="1"/>
+              <a:t>ma</a:t>
+            </a:r>
+            <a:r>
+              <a:rPr lang="en-US" dirty="0"/>
+              <a:t>p</a:t>
+            </a:r>
+            <a:endParaRPr dirty="0"/>
           </a:p>
         </p:txBody>
       </p:sp>
@@ -18528,10 +18594,18 @@
               <a:buNone/>
             </a:pPr>
             <a:r>
-              <a:rPr lang="ru-RU"/>
-              <a:t>tree</a:t>
+              <a:rPr lang="en-US" dirty="0"/>
+              <a:t>T</a:t>
             </a:r>
-            <a:endParaRPr/>
+            <a:r>
+              <a:rPr lang="ru-RU" dirty="0" err="1"/>
+              <a:t>ree</a:t>
+            </a:r>
+            <a:r>
+              <a:rPr lang="en-US" dirty="0"/>
+              <a:t>s</a:t>
+            </a:r>
+            <a:endParaRPr dirty="0"/>
           </a:p>
         </p:txBody>
       </p:sp>
@@ -18939,26 +19013,6 @@
               <a:rPr lang="ru-RU" dirty="0" err="1"/>
               <a:t>Professor</a:t>
             </a:r>
-            <a:r>
-              <a:rPr lang="ru-RU" dirty="0"/>
-              <a:t> </a:t>
-            </a:r>
-            <a:r>
-              <a:rPr lang="ru-RU" dirty="0" err="1"/>
-              <a:t>of</a:t>
-            </a:r>
-            <a:r>
-              <a:rPr lang="ru-RU" dirty="0"/>
-              <a:t> </a:t>
-            </a:r>
-            <a:r>
-              <a:rPr lang="ru-RU" dirty="0" err="1"/>
-              <a:t>the</a:t>
-            </a:r>
-            <a:r>
-              <a:rPr lang="ru-RU" dirty="0"/>
-              <a:t> </a:t>
-            </a:r>
             <a:endParaRPr lang="en-US" dirty="0"/>
           </a:p>
           <a:p>
@@ -19177,17 +19231,13 @@
               <a:buNone/>
             </a:pPr>
             <a:r>
-              <a:rPr lang="ru-RU"/>
+              <a:rPr lang="ru-RU" dirty="0"/>
               <a:t>MIND MAP</a:t>
             </a:r>
             <a:br>
-              <a:rPr lang="ru-RU"/>
+              <a:rPr lang="ru-RU" dirty="0"/>
             </a:br>
-            <a:r>
-              <a:rPr lang="ru-RU"/>
-              <a:t>mind map</a:t>
-            </a:r>
-            <a:endParaRPr/>
+            <a:endParaRPr dirty="0"/>
           </a:p>
         </p:txBody>
       </p:sp>
@@ -19668,6 +19718,260 @@
   <p:cSld>
     <p:spTree>
       <p:nvGrpSpPr>
+        <p:cNvPr id="1" name=""/>
+        <p:cNvGrpSpPr/>
+        <p:nvPr/>
+      </p:nvGrpSpPr>
+      <p:grpSpPr>
+        <a:xfrm>
+          <a:off x="0" y="0"/>
+          <a:ext cx="0" cy="0"/>
+          <a:chOff x="0" y="0"/>
+          <a:chExt cx="0" cy="0"/>
+        </a:xfrm>
+      </p:grpSpPr>
+      <p:sp>
+        <p:nvSpPr>
+          <p:cNvPr id="2" name="Заголовок 1">
+            <a:extLst>
+              <a:ext uri="{FF2B5EF4-FFF2-40B4-BE49-F238E27FC236}">
+                <a16:creationId xmlns:a16="http://schemas.microsoft.com/office/drawing/2014/main" id="{801662FA-5C50-418F-B457-FD0999A14D83}"/>
+              </a:ext>
+            </a:extLst>
+          </p:cNvPr>
+          <p:cNvSpPr>
+            <a:spLocks noGrp="1"/>
+          </p:cNvSpPr>
+          <p:nvPr>
+            <p:ph type="title"/>
+          </p:nvPr>
+        </p:nvSpPr>
+        <p:spPr/>
+        <p:txBody>
+          <a:bodyPr>
+            <a:normAutofit fontScale="90000"/>
+          </a:bodyPr>
+          <a:lstStyle/>
+          <a:p>
+            <a:r>
+              <a:rPr lang="en-US" b="1" i="0" dirty="0">
+                <a:solidFill>
+                  <a:srgbClr val="0F0F0F"/>
+                </a:solidFill>
+                <a:effectLst/>
+                <a:latin typeface="Roboto" panose="02000000000000000000" pitchFamily="2" charset="0"/>
+              </a:rPr>
+              <a:t>The Career Venn Diagram – </a:t>
+            </a:r>
+            <a:br>
+              <a:rPr lang="en-US" b="1" i="0" dirty="0">
+                <a:solidFill>
+                  <a:srgbClr val="0F0F0F"/>
+                </a:solidFill>
+                <a:effectLst/>
+                <a:latin typeface="Roboto" panose="02000000000000000000" pitchFamily="2" charset="0"/>
+              </a:rPr>
+            </a:br>
+            <a:r>
+              <a:rPr lang="en-US" b="1" i="0" dirty="0">
+                <a:solidFill>
+                  <a:srgbClr val="0F0F0F"/>
+                </a:solidFill>
+                <a:effectLst/>
+                <a:latin typeface="Roboto" panose="02000000000000000000" pitchFamily="2" charset="0"/>
+              </a:rPr>
+              <a:t>Don McMillan</a:t>
+            </a:r>
+            <a:endParaRPr lang="en-US" dirty="0"/>
+          </a:p>
+        </p:txBody>
+      </p:sp>
+      <p:pic>
+        <p:nvPicPr>
+          <p:cNvPr id="4" name="Мультимедіа з Інтернету 3" title="The Career Venn Diagram - Don McMillan">
+            <a:hlinkClick r:id="" action="ppaction://media"/>
+            <a:extLst>
+              <a:ext uri="{FF2B5EF4-FFF2-40B4-BE49-F238E27FC236}">
+                <a16:creationId xmlns:a16="http://schemas.microsoft.com/office/drawing/2014/main" id="{714531AB-E7E6-4ED8-88B8-F8CC8CACD6DA}"/>
+              </a:ext>
+            </a:extLst>
+          </p:cNvPr>
+          <p:cNvPicPr>
+            <a:picLocks noRot="1" noChangeAspect="1"/>
+          </p:cNvPicPr>
+          <p:nvPr>
+            <a:videoFile r:link="rId1"/>
+          </p:nvPr>
+        </p:nvPicPr>
+        <p:blipFill>
+          <a:blip r:embed="rId3"/>
+          <a:stretch>
+            <a:fillRect/>
+          </a:stretch>
+        </p:blipFill>
+        <p:spPr>
+          <a:xfrm>
+            <a:off x="855579" y="1837156"/>
+            <a:ext cx="7831221" cy="4424640"/>
+          </a:xfrm>
+          <a:prstGeom prst="rect">
+            <a:avLst/>
+          </a:prstGeom>
+        </p:spPr>
+      </p:pic>
+    </p:spTree>
+    <p:extLst>
+      <p:ext uri="{BB962C8B-B14F-4D97-AF65-F5344CB8AC3E}">
+        <p14:creationId xmlns:p14="http://schemas.microsoft.com/office/powerpoint/2010/main" val="3062143632"/>
+      </p:ext>
+    </p:extLst>
+  </p:cSld>
+  <p:clrMapOvr>
+    <a:masterClrMapping/>
+  </p:clrMapOvr>
+  <p:timing>
+    <p:tnLst>
+      <p:par>
+        <p:cTn id="1" dur="indefinite" restart="never" nodeType="tmRoot">
+          <p:childTnLst>
+            <p:seq concurrent="1" nextAc="seek">
+              <p:cTn id="2" dur="indefinite" nodeType="mainSeq">
+                <p:childTnLst>
+                  <p:par>
+                    <p:cTn id="3" fill="hold">
+                      <p:stCondLst>
+                        <p:cond delay="indefinite"/>
+                      </p:stCondLst>
+                      <p:childTnLst>
+                        <p:par>
+                          <p:cTn id="4" fill="hold">
+                            <p:stCondLst>
+                              <p:cond delay="0"/>
+                            </p:stCondLst>
+                            <p:childTnLst>
+                              <p:par>
+                                <p:cTn id="5" presetID="1" presetClass="mediacall" presetSubtype="0" fill="hold" nodeType="clickEffect">
+                                  <p:stCondLst>
+                                    <p:cond delay="0"/>
+                                  </p:stCondLst>
+                                  <p:childTnLst>
+                                    <p:cmd type="call" cmd="playFrom(0.0)">
+                                      <p:cBhvr>
+                                        <p:cTn id="6" dur="1" fill="hold"/>
+                                        <p:tgtEl>
+                                          <p:spTgt spid="4"/>
+                                        </p:tgtEl>
+                                      </p:cBhvr>
+                                    </p:cmd>
+                                  </p:childTnLst>
+                                </p:cTn>
+                              </p:par>
+                            </p:childTnLst>
+                          </p:cTn>
+                        </p:par>
+                      </p:childTnLst>
+                    </p:cTn>
+                  </p:par>
+                </p:childTnLst>
+              </p:cTn>
+              <p:prevCondLst>
+                <p:cond evt="onPrev" delay="0">
+                  <p:tgtEl>
+                    <p:sldTgt/>
+                  </p:tgtEl>
+                </p:cond>
+              </p:prevCondLst>
+              <p:nextCondLst>
+                <p:cond evt="onNext" delay="0">
+                  <p:tgtEl>
+                    <p:sldTgt/>
+                  </p:tgtEl>
+                </p:cond>
+              </p:nextCondLst>
+            </p:seq>
+            <p:video>
+              <p:cMediaNode vol="80000">
+                <p:cTn id="7" fill="hold" display="0">
+                  <p:stCondLst>
+                    <p:cond delay="indefinite"/>
+                  </p:stCondLst>
+                </p:cTn>
+                <p:tgtEl>
+                  <p:spTgt spid="4"/>
+                </p:tgtEl>
+              </p:cMediaNode>
+            </p:video>
+            <p:seq concurrent="1" nextAc="seek">
+              <p:cTn id="8" restart="whenNotActive" fill="hold" evtFilter="cancelBubble" nodeType="interactiveSeq">
+                <p:stCondLst>
+                  <p:cond evt="onClick" delay="0">
+                    <p:tgtEl>
+                      <p:spTgt spid="4"/>
+                    </p:tgtEl>
+                  </p:cond>
+                </p:stCondLst>
+                <p:endSync evt="end" delay="0">
+                  <p:rtn val="all"/>
+                </p:endSync>
+                <p:childTnLst>
+                  <p:par>
+                    <p:cTn id="9" fill="hold">
+                      <p:stCondLst>
+                        <p:cond delay="0"/>
+                      </p:stCondLst>
+                      <p:childTnLst>
+                        <p:par>
+                          <p:cTn id="10" fill="hold">
+                            <p:stCondLst>
+                              <p:cond delay="0"/>
+                            </p:stCondLst>
+                            <p:childTnLst>
+                              <p:par>
+                                <p:cTn id="11" presetID="2" presetClass="mediacall" presetSubtype="0" fill="hold" nodeType="clickEffect">
+                                  <p:stCondLst>
+                                    <p:cond delay="0"/>
+                                  </p:stCondLst>
+                                  <p:childTnLst>
+                                    <p:cmd type="call" cmd="togglePause">
+                                      <p:cBhvr>
+                                        <p:cTn id="12" dur="1" fill="hold"/>
+                                        <p:tgtEl>
+                                          <p:spTgt spid="4"/>
+                                        </p:tgtEl>
+                                      </p:cBhvr>
+                                    </p:cmd>
+                                  </p:childTnLst>
+                                </p:cTn>
+                              </p:par>
+                            </p:childTnLst>
+                          </p:cTn>
+                        </p:par>
+                      </p:childTnLst>
+                    </p:cTn>
+                  </p:par>
+                </p:childTnLst>
+              </p:cTn>
+              <p:nextCondLst>
+                <p:cond evt="onClick" delay="0">
+                  <p:tgtEl>
+                    <p:spTgt spid="4"/>
+                  </p:tgtEl>
+                </p:cond>
+              </p:nextCondLst>
+            </p:seq>
+          </p:childTnLst>
+        </p:cTn>
+      </p:par>
+    </p:tnLst>
+  </p:timing>
+</p:sld>
+</file>
+
+<file path=ppt/slides/slide34.xml><?xml version="1.0" encoding="utf-8"?>
+<p:sld xmlns:a="http://schemas.openxmlformats.org/drawingml/2006/main" xmlns:r="http://schemas.openxmlformats.org/officeDocument/2006/relationships" xmlns:p="http://schemas.openxmlformats.org/presentationml/2006/main">
+  <p:cSld>
+    <p:spTree>
+      <p:nvGrpSpPr>
         <p:cNvPr id="1" name="Shape 294"/>
         <p:cNvGrpSpPr/>
         <p:nvPr/>
@@ -19843,7 +20147,7 @@
 </p:sld>
 </file>
 
-<file path=ppt/slides/slide34.xml><?xml version="1.0" encoding="utf-8"?>
+<file path=ppt/slides/slide35.xml><?xml version="1.0" encoding="utf-8"?>
 <p:sld xmlns:a="http://schemas.openxmlformats.org/drawingml/2006/main" xmlns:r="http://schemas.openxmlformats.org/officeDocument/2006/relationships" xmlns:p="http://schemas.openxmlformats.org/presentationml/2006/main">
   <p:cSld>
     <p:spTree>
@@ -19992,7 +20296,7 @@
 </p:sld>
 </file>
 
-<file path=ppt/slides/slide35.xml><?xml version="1.0" encoding="utf-8"?>
+<file path=ppt/slides/slide36.xml><?xml version="1.0" encoding="utf-8"?>
 <p:sld xmlns:a="http://schemas.openxmlformats.org/drawingml/2006/main" xmlns:r="http://schemas.openxmlformats.org/officeDocument/2006/relationships" xmlns:p="http://schemas.openxmlformats.org/presentationml/2006/main">
   <p:cSld>
     <p:spTree>
@@ -20141,7 +20445,7 @@
 </p:sld>
 </file>
 
-<file path=ppt/slides/slide36.xml><?xml version="1.0" encoding="utf-8"?>
+<file path=ppt/slides/slide37.xml><?xml version="1.0" encoding="utf-8"?>
 <p:sld xmlns:a="http://schemas.openxmlformats.org/drawingml/2006/main" xmlns:r="http://schemas.openxmlformats.org/officeDocument/2006/relationships" xmlns:p="http://schemas.openxmlformats.org/presentationml/2006/main">
   <p:cSld>
     <p:spTree>
@@ -20290,7 +20594,7 @@
 </p:sld>
 </file>
 
-<file path=ppt/slides/slide37.xml><?xml version="1.0" encoding="utf-8"?>
+<file path=ppt/slides/slide38.xml><?xml version="1.0" encoding="utf-8"?>
 <p:sld xmlns:a="http://schemas.openxmlformats.org/drawingml/2006/main" xmlns:r="http://schemas.openxmlformats.org/officeDocument/2006/relationships" xmlns:p="http://schemas.openxmlformats.org/presentationml/2006/main">
   <p:cSld>
     <p:spTree>
@@ -20439,7 +20743,7 @@
 </p:sld>
 </file>
 
-<file path=ppt/slides/slide38.xml><?xml version="1.0" encoding="utf-8"?>
+<file path=ppt/slides/slide39.xml><?xml version="1.0" encoding="utf-8"?>
 <p:sld xmlns:a="http://schemas.openxmlformats.org/drawingml/2006/main" xmlns:r="http://schemas.openxmlformats.org/officeDocument/2006/relationships" xmlns:p="http://schemas.openxmlformats.org/presentationml/2006/main">
   <p:cSld>
     <p:spTree>
@@ -20500,56 +20804,10 @@
               <a:buNone/>
             </a:pPr>
             <a:r>
-              <a:rPr lang="ru-RU"/>
-              <a:t>Scale</a:t>
+              <a:rPr lang="en-US" dirty="0"/>
+              <a:t>How to lie with graphs?</a:t>
             </a:r>
-            <a:endParaRPr/>
-          </a:p>
-        </p:txBody>
-      </p:sp>
-      <p:sp>
-        <p:nvSpPr>
-          <p:cNvPr id="332" name="Google Shape;332;p35"/>
-          <p:cNvSpPr txBox="1">
-            <a:spLocks noGrp="1"/>
-          </p:cNvSpPr>
-          <p:nvPr>
-            <p:ph type="body" idx="1"/>
-          </p:nvPr>
-        </p:nvSpPr>
-        <p:spPr>
-          <a:xfrm>
-            <a:off x="457200" y="1600200"/>
-            <a:ext cx="8229600" cy="4525963"/>
-          </a:xfrm>
-          <a:prstGeom prst="rect">
-            <a:avLst/>
-          </a:prstGeom>
-          <a:noFill/>
-          <a:ln>
-            <a:noFill/>
-          </a:ln>
-        </p:spPr>
-        <p:txBody>
-          <a:bodyPr spcFirstLastPara="1" wrap="square" lIns="91425" tIns="45700" rIns="91425" bIns="45700" anchor="t" anchorCtr="0">
-            <a:normAutofit/>
-          </a:bodyPr>
-          <a:lstStyle/>
-          <a:p>
-            <a:pPr marL="342900" lvl="0" indent="-139700" algn="l" rtl="0">
-              <a:spcBef>
-                <a:spcPts val="0"/>
-              </a:spcBef>
-              <a:spcAft>
-                <a:spcPts val="0"/>
-              </a:spcAft>
-              <a:buClr>
-                <a:schemeClr val="dk1"/>
-              </a:buClr>
-              <a:buSzPts val="3200"/>
-              <a:buNone/>
-            </a:pPr>
-            <a:endParaRPr/>
+            <a:endParaRPr dirty="0"/>
           </a:p>
         </p:txBody>
       </p:sp>
@@ -20570,210 +20828,6 @@
           <a:xfrm>
             <a:off x="249957" y="2492896"/>
             <a:ext cx="8572500" cy="2676525"/>
-          </a:xfrm>
-          <a:prstGeom prst="rect">
-            <a:avLst/>
-          </a:prstGeom>
-          <a:noFill/>
-          <a:ln>
-            <a:noFill/>
-          </a:ln>
-        </p:spPr>
-      </p:pic>
-      <p:pic>
-        <p:nvPicPr>
-          <p:cNvPr id="334" name="Google Shape;334;p35"/>
-          <p:cNvPicPr preferRelativeResize="0"/>
-          <p:nvPr/>
-        </p:nvPicPr>
-        <p:blipFill>
-          <a:blip r:embed="rId4">
-            <a:alphaModFix/>
-          </a:blip>
-          <a:stretch>
-            <a:fillRect/>
-          </a:stretch>
-        </p:blipFill>
-        <p:spPr>
-          <a:xfrm>
-            <a:off x="152400" y="6278563"/>
-            <a:ext cx="427037" cy="427037"/>
-          </a:xfrm>
-          <a:prstGeom prst="rect">
-            <a:avLst/>
-          </a:prstGeom>
-          <a:noFill/>
-          <a:ln>
-            <a:noFill/>
-          </a:ln>
-        </p:spPr>
-      </p:pic>
-    </p:spTree>
-  </p:cSld>
-  <p:clrMapOvr>
-    <a:masterClrMapping/>
-  </p:clrMapOvr>
-</p:sld>
-</file>
-
-<file path=ppt/slides/slide39.xml><?xml version="1.0" encoding="utf-8"?>
-<p:sld xmlns:a="http://schemas.openxmlformats.org/drawingml/2006/main" xmlns:r="http://schemas.openxmlformats.org/officeDocument/2006/relationships" xmlns:p="http://schemas.openxmlformats.org/presentationml/2006/main">
-  <p:cSld>
-    <p:spTree>
-      <p:nvGrpSpPr>
-        <p:cNvPr id="1" name="Shape 345"/>
-        <p:cNvGrpSpPr/>
-        <p:nvPr/>
-      </p:nvGrpSpPr>
-      <p:grpSpPr>
-        <a:xfrm>
-          <a:off x="0" y="0"/>
-          <a:ext cx="0" cy="0"/>
-          <a:chOff x="0" y="0"/>
-          <a:chExt cx="0" cy="0"/>
-        </a:xfrm>
-      </p:grpSpPr>
-      <p:sp>
-        <p:nvSpPr>
-          <p:cNvPr id="346" name="Google Shape;346;p37"/>
-          <p:cNvSpPr txBox="1">
-            <a:spLocks noGrp="1"/>
-          </p:cNvSpPr>
-          <p:nvPr>
-            <p:ph type="title"/>
-          </p:nvPr>
-        </p:nvSpPr>
-        <p:spPr>
-          <a:xfrm>
-            <a:off x="457200" y="274638"/>
-            <a:ext cx="8229600" cy="1143000"/>
-          </a:xfrm>
-          <a:prstGeom prst="rect">
-            <a:avLst/>
-          </a:prstGeom>
-          <a:noFill/>
-          <a:ln>
-            <a:noFill/>
-          </a:ln>
-        </p:spPr>
-        <p:txBody>
-          <a:bodyPr spcFirstLastPara="1" wrap="square" lIns="91425" tIns="45700" rIns="91425" bIns="45700" anchor="ctr" anchorCtr="0">
-            <a:normAutofit/>
-          </a:bodyPr>
-          <a:lstStyle/>
-          <a:p>
-            <a:pPr marL="0" lvl="0" indent="0" algn="ctr" rtl="0">
-              <a:spcBef>
-                <a:spcPts val="0"/>
-              </a:spcBef>
-              <a:spcAft>
-                <a:spcPts val="0"/>
-              </a:spcAft>
-              <a:buClr>
-                <a:schemeClr val="dk1"/>
-              </a:buClr>
-              <a:buSzPts val="4400"/>
-              <a:buFont typeface="Calibri"/>
-              <a:buNone/>
-            </a:pPr>
-            <a:r>
-              <a:rPr lang="ru-RU"/>
-              <a:t>Unsuccessful charts</a:t>
-            </a:r>
-            <a:endParaRPr/>
-          </a:p>
-        </p:txBody>
-      </p:sp>
-      <p:sp>
-        <p:nvSpPr>
-          <p:cNvPr id="347" name="Google Shape;347;p37"/>
-          <p:cNvSpPr txBox="1">
-            <a:spLocks noGrp="1"/>
-          </p:cNvSpPr>
-          <p:nvPr>
-            <p:ph type="body" idx="1"/>
-          </p:nvPr>
-        </p:nvSpPr>
-        <p:spPr>
-          <a:xfrm>
-            <a:off x="457200" y="1600200"/>
-            <a:ext cx="8229600" cy="4525963"/>
-          </a:xfrm>
-          <a:prstGeom prst="rect">
-            <a:avLst/>
-          </a:prstGeom>
-          <a:noFill/>
-          <a:ln>
-            <a:noFill/>
-          </a:ln>
-        </p:spPr>
-        <p:txBody>
-          <a:bodyPr spcFirstLastPara="1" wrap="square" lIns="91425" tIns="45700" rIns="91425" bIns="45700" anchor="t" anchorCtr="0">
-            <a:normAutofit/>
-          </a:bodyPr>
-          <a:lstStyle/>
-          <a:p>
-            <a:pPr marL="342900" lvl="0" indent="-139700" algn="l" rtl="0">
-              <a:spcBef>
-                <a:spcPts val="0"/>
-              </a:spcBef>
-              <a:spcAft>
-                <a:spcPts val="0"/>
-              </a:spcAft>
-              <a:buClr>
-                <a:schemeClr val="dk1"/>
-              </a:buClr>
-              <a:buSzPts val="3200"/>
-              <a:buNone/>
-            </a:pPr>
-            <a:endParaRPr/>
-          </a:p>
-        </p:txBody>
-      </p:sp>
-      <p:pic>
-        <p:nvPicPr>
-          <p:cNvPr id="348" name="Google Shape;348;p37" descr="Statistica_powerpassports"/>
-          <p:cNvPicPr preferRelativeResize="0"/>
-          <p:nvPr/>
-        </p:nvPicPr>
-        <p:blipFill rotWithShape="1">
-          <a:blip r:embed="rId3">
-            <a:alphaModFix/>
-          </a:blip>
-          <a:srcRect/>
-          <a:stretch/>
-        </p:blipFill>
-        <p:spPr>
-          <a:xfrm>
-            <a:off x="179512" y="2838450"/>
-            <a:ext cx="4573088" cy="3240360"/>
-          </a:xfrm>
-          <a:prstGeom prst="rect">
-            <a:avLst/>
-          </a:prstGeom>
-          <a:noFill/>
-          <a:ln>
-            <a:noFill/>
-          </a:ln>
-        </p:spPr>
-      </p:pic>
-      <p:pic>
-        <p:nvPicPr>
-          <p:cNvPr id="349" name="Google Shape;349;p37" descr="Mc_cellphones_money17"/>
-          <p:cNvPicPr preferRelativeResize="0"/>
-          <p:nvPr/>
-        </p:nvPicPr>
-        <p:blipFill rotWithShape="1">
-          <a:blip r:embed="rId4">
-            <a:alphaModFix/>
-          </a:blip>
-          <a:srcRect/>
-          <a:stretch/>
-        </p:blipFill>
-        <p:spPr>
-          <a:xfrm>
-            <a:off x="4644008" y="1075150"/>
-            <a:ext cx="4320480" cy="3153950"/>
           </a:xfrm>
           <a:prstGeom prst="rect">
             <a:avLst/>
@@ -20903,10 +20957,34 @@
               <a:buChar char="•"/>
             </a:pPr>
             <a:r>
-              <a:rPr lang="ru-RU"/>
-              <a:t>Visualization of numerical data</a:t>
+              <a:rPr lang="ru-RU" dirty="0" err="1"/>
+              <a:t>Visualization</a:t>
             </a:r>
-            <a:endParaRPr/>
+            <a:r>
+              <a:rPr lang="ru-RU" dirty="0"/>
+              <a:t> </a:t>
+            </a:r>
+            <a:r>
+              <a:rPr lang="ru-RU" dirty="0" err="1"/>
+              <a:t>of</a:t>
+            </a:r>
+            <a:r>
+              <a:rPr lang="ru-RU" dirty="0"/>
+              <a:t> </a:t>
+            </a:r>
+            <a:r>
+              <a:rPr lang="ru-RU" dirty="0" err="1"/>
+              <a:t>numerical</a:t>
+            </a:r>
+            <a:r>
+              <a:rPr lang="ru-RU" dirty="0"/>
+              <a:t> </a:t>
+            </a:r>
+            <a:r>
+              <a:rPr lang="ru-RU" dirty="0" err="1"/>
+              <a:t>data</a:t>
+            </a:r>
+            <a:endParaRPr dirty="0"/>
           </a:p>
           <a:p>
             <a:pPr marL="342900" lvl="0" indent="-342900" algn="l" rtl="0">
@@ -20923,10 +21001,34 @@
               <a:buChar char="•"/>
             </a:pPr>
             <a:r>
-              <a:rPr lang="ru-RU"/>
-              <a:t>Visualization of nonnumeric data</a:t>
+              <a:rPr lang="ru-RU" dirty="0" err="1"/>
+              <a:t>Visualization</a:t>
             </a:r>
-            <a:endParaRPr/>
+            <a:r>
+              <a:rPr lang="ru-RU" dirty="0"/>
+              <a:t> </a:t>
+            </a:r>
+            <a:r>
+              <a:rPr lang="ru-RU" dirty="0" err="1"/>
+              <a:t>of</a:t>
+            </a:r>
+            <a:r>
+              <a:rPr lang="ru-RU" dirty="0"/>
+              <a:t> </a:t>
+            </a:r>
+            <a:r>
+              <a:rPr lang="ru-RU" dirty="0" err="1"/>
+              <a:t>nonnumeric</a:t>
+            </a:r>
+            <a:r>
+              <a:rPr lang="ru-RU" dirty="0"/>
+              <a:t> </a:t>
+            </a:r>
+            <a:r>
+              <a:rPr lang="ru-RU" dirty="0" err="1"/>
+              <a:t>data</a:t>
+            </a:r>
+            <a:endParaRPr dirty="0"/>
           </a:p>
           <a:p>
             <a:pPr marL="742950" lvl="1" indent="-285750" algn="l" rtl="0">
@@ -20943,10 +21045,26 @@
               <a:buChar char="–"/>
             </a:pPr>
             <a:r>
-              <a:rPr lang="ru-RU"/>
-              <a:t>Binary tree visualization</a:t>
+              <a:rPr lang="ru-RU" dirty="0" err="1"/>
+              <a:t>Binary</a:t>
             </a:r>
-            <a:endParaRPr/>
+            <a:r>
+              <a:rPr lang="ru-RU" dirty="0"/>
+              <a:t> </a:t>
+            </a:r>
+            <a:r>
+              <a:rPr lang="ru-RU" dirty="0" err="1"/>
+              <a:t>tree</a:t>
+            </a:r>
+            <a:r>
+              <a:rPr lang="ru-RU" dirty="0"/>
+              <a:t> </a:t>
+            </a:r>
+            <a:r>
+              <a:rPr lang="ru-RU" dirty="0" err="1"/>
+              <a:t>visualization</a:t>
+            </a:r>
+            <a:endParaRPr dirty="0"/>
           </a:p>
           <a:p>
             <a:pPr marL="742950" lvl="1" indent="-285750" algn="l" rtl="0">
@@ -20963,10 +21081,18 @@
               <a:buChar char="–"/>
             </a:pPr>
             <a:r>
-              <a:rPr lang="ru-RU"/>
-              <a:t>Graph visualization</a:t>
+              <a:rPr lang="ru-RU" dirty="0" err="1"/>
+              <a:t>Graph</a:t>
             </a:r>
-            <a:endParaRPr/>
+            <a:r>
+              <a:rPr lang="ru-RU" dirty="0"/>
+              <a:t> </a:t>
+            </a:r>
+            <a:r>
+              <a:rPr lang="ru-RU" dirty="0" err="1"/>
+              <a:t>visualization</a:t>
+            </a:r>
+            <a:endParaRPr dirty="0"/>
           </a:p>
           <a:p>
             <a:pPr marL="342900" lvl="0" indent="-342900" algn="l" rtl="0">
@@ -20983,10 +21109,58 @@
               <a:buChar char="•"/>
             </a:pPr>
             <a:r>
-              <a:rPr lang="ru-RU"/>
-              <a:t>Dimensionality reduction algorithms in data visualization tasks</a:t>
+              <a:rPr lang="ru-RU" dirty="0" err="1"/>
+              <a:t>Dimensionality</a:t>
             </a:r>
-            <a:endParaRPr/>
+            <a:r>
+              <a:rPr lang="ru-RU" dirty="0"/>
+              <a:t> </a:t>
+            </a:r>
+            <a:r>
+              <a:rPr lang="ru-RU" dirty="0" err="1"/>
+              <a:t>reduction</a:t>
+            </a:r>
+            <a:r>
+              <a:rPr lang="ru-RU" dirty="0"/>
+              <a:t> </a:t>
+            </a:r>
+            <a:r>
+              <a:rPr lang="ru-RU" dirty="0" err="1"/>
+              <a:t>algorithms</a:t>
+            </a:r>
+            <a:r>
+              <a:rPr lang="ru-RU" dirty="0"/>
+              <a:t> </a:t>
+            </a:r>
+            <a:r>
+              <a:rPr lang="ru-RU" dirty="0" err="1"/>
+              <a:t>in</a:t>
+            </a:r>
+            <a:r>
+              <a:rPr lang="ru-RU" dirty="0"/>
+              <a:t> </a:t>
+            </a:r>
+            <a:r>
+              <a:rPr lang="ru-RU" dirty="0" err="1"/>
+              <a:t>data</a:t>
+            </a:r>
+            <a:r>
+              <a:rPr lang="ru-RU" dirty="0"/>
+              <a:t> </a:t>
+            </a:r>
+            <a:r>
+              <a:rPr lang="ru-RU" dirty="0" err="1"/>
+              <a:t>visualization</a:t>
+            </a:r>
+            <a:r>
+              <a:rPr lang="ru-RU" dirty="0"/>
+              <a:t> </a:t>
+            </a:r>
+            <a:r>
+              <a:rPr lang="ru-RU" dirty="0" err="1"/>
+              <a:t>tasks</a:t>
+            </a:r>
+            <a:endParaRPr dirty="0"/>
           </a:p>
           <a:p>
             <a:pPr marL="342900" lvl="0" indent="-342900" algn="l" rtl="0">
@@ -21003,10 +21177,74 @@
               <a:buChar char="•"/>
             </a:pPr>
             <a:r>
-              <a:rPr lang="ru-RU"/>
-              <a:t>Visualization of text data (tex/latex)</a:t>
+              <a:rPr lang="ru-RU" dirty="0" err="1"/>
+              <a:t>Visualization</a:t>
             </a:r>
-            <a:endParaRPr/>
+            <a:r>
+              <a:rPr lang="ru-RU" dirty="0"/>
+              <a:t> </a:t>
+            </a:r>
+            <a:r>
+              <a:rPr lang="ru-RU" dirty="0" err="1"/>
+              <a:t>of</a:t>
+            </a:r>
+            <a:r>
+              <a:rPr lang="ru-RU" dirty="0"/>
+              <a:t> </a:t>
+            </a:r>
+            <a:r>
+              <a:rPr lang="ru-RU" dirty="0" err="1"/>
+              <a:t>text</a:t>
+            </a:r>
+            <a:r>
+              <a:rPr lang="ru-RU" dirty="0"/>
+              <a:t> </a:t>
+            </a:r>
+            <a:r>
+              <a:rPr lang="ru-RU" dirty="0" err="1"/>
+              <a:t>data</a:t>
+            </a:r>
+            <a:r>
+              <a:rPr lang="ru-RU" dirty="0"/>
+              <a:t> (</a:t>
+            </a:r>
+            <a:r>
+              <a:rPr lang="ru-RU" dirty="0" err="1"/>
+              <a:t>tex</a:t>
+            </a:r>
+            <a:r>
+              <a:rPr lang="ru-RU" dirty="0"/>
+              <a:t>/</a:t>
+            </a:r>
+            <a:r>
+              <a:rPr lang="ru-RU" dirty="0" err="1"/>
+              <a:t>latex</a:t>
+            </a:r>
+            <a:r>
+              <a:rPr lang="ru-RU" dirty="0"/>
+              <a:t>)</a:t>
+            </a:r>
+            <a:endParaRPr lang="en-US" dirty="0"/>
+          </a:p>
+          <a:p>
+            <a:pPr marL="342900" lvl="0" indent="-342900" algn="l" rtl="0">
+              <a:spcBef>
+                <a:spcPts val="640"/>
+              </a:spcBef>
+              <a:spcAft>
+                <a:spcPts val="0"/>
+              </a:spcAft>
+              <a:buClr>
+                <a:schemeClr val="dk1"/>
+              </a:buClr>
+              <a:buSzPts val="3200"/>
+              <a:buChar char="•"/>
+            </a:pPr>
+            <a:r>
+              <a:rPr lang="en-US" dirty="0" err="1"/>
+              <a:t>Infografics</a:t>
+            </a:r>
+            <a:endParaRPr dirty="0"/>
           </a:p>
         </p:txBody>
       </p:sp>
@@ -21019,6 +21257,182 @@
 </file>
 
 <file path=ppt/slides/slide40.xml><?xml version="1.0" encoding="utf-8"?>
+<p:sld xmlns:a="http://schemas.openxmlformats.org/drawingml/2006/main" xmlns:r="http://schemas.openxmlformats.org/officeDocument/2006/relationships" xmlns:p="http://schemas.openxmlformats.org/presentationml/2006/main">
+  <p:cSld>
+    <p:spTree>
+      <p:nvGrpSpPr>
+        <p:cNvPr id="1" name="Shape 345"/>
+        <p:cNvGrpSpPr/>
+        <p:nvPr/>
+      </p:nvGrpSpPr>
+      <p:grpSpPr>
+        <a:xfrm>
+          <a:off x="0" y="0"/>
+          <a:ext cx="0" cy="0"/>
+          <a:chOff x="0" y="0"/>
+          <a:chExt cx="0" cy="0"/>
+        </a:xfrm>
+      </p:grpSpPr>
+      <p:sp>
+        <p:nvSpPr>
+          <p:cNvPr id="346" name="Google Shape;346;p37"/>
+          <p:cNvSpPr txBox="1">
+            <a:spLocks noGrp="1"/>
+          </p:cNvSpPr>
+          <p:nvPr>
+            <p:ph type="title"/>
+          </p:nvPr>
+        </p:nvSpPr>
+        <p:spPr>
+          <a:xfrm>
+            <a:off x="457200" y="274638"/>
+            <a:ext cx="8229600" cy="1143000"/>
+          </a:xfrm>
+          <a:prstGeom prst="rect">
+            <a:avLst/>
+          </a:prstGeom>
+          <a:noFill/>
+          <a:ln>
+            <a:noFill/>
+          </a:ln>
+        </p:spPr>
+        <p:txBody>
+          <a:bodyPr spcFirstLastPara="1" wrap="square" lIns="91425" tIns="45700" rIns="91425" bIns="45700" anchor="ctr" anchorCtr="0">
+            <a:normAutofit/>
+          </a:bodyPr>
+          <a:lstStyle/>
+          <a:p>
+            <a:pPr marL="0" lvl="0" indent="0" algn="ctr" rtl="0">
+              <a:spcBef>
+                <a:spcPts val="0"/>
+              </a:spcBef>
+              <a:spcAft>
+                <a:spcPts val="0"/>
+              </a:spcAft>
+              <a:buClr>
+                <a:schemeClr val="dk1"/>
+              </a:buClr>
+              <a:buSzPts val="4400"/>
+              <a:buFont typeface="Calibri"/>
+              <a:buNone/>
+            </a:pPr>
+            <a:r>
+              <a:rPr lang="ru-RU"/>
+              <a:t>Unsuccessful charts</a:t>
+            </a:r>
+            <a:endParaRPr/>
+          </a:p>
+        </p:txBody>
+      </p:sp>
+      <p:sp>
+        <p:nvSpPr>
+          <p:cNvPr id="347" name="Google Shape;347;p37"/>
+          <p:cNvSpPr txBox="1">
+            <a:spLocks noGrp="1"/>
+          </p:cNvSpPr>
+          <p:nvPr>
+            <p:ph type="body" idx="1"/>
+          </p:nvPr>
+        </p:nvSpPr>
+        <p:spPr>
+          <a:xfrm>
+            <a:off x="457200" y="1600200"/>
+            <a:ext cx="8229600" cy="4525963"/>
+          </a:xfrm>
+          <a:prstGeom prst="rect">
+            <a:avLst/>
+          </a:prstGeom>
+          <a:noFill/>
+          <a:ln>
+            <a:noFill/>
+          </a:ln>
+        </p:spPr>
+        <p:txBody>
+          <a:bodyPr spcFirstLastPara="1" wrap="square" lIns="91425" tIns="45700" rIns="91425" bIns="45700" anchor="t" anchorCtr="0">
+            <a:normAutofit/>
+          </a:bodyPr>
+          <a:lstStyle/>
+          <a:p>
+            <a:pPr marL="342900" lvl="0" indent="-139700" algn="l" rtl="0">
+              <a:spcBef>
+                <a:spcPts val="0"/>
+              </a:spcBef>
+              <a:spcAft>
+                <a:spcPts val="0"/>
+              </a:spcAft>
+              <a:buClr>
+                <a:schemeClr val="dk1"/>
+              </a:buClr>
+              <a:buSzPts val="3200"/>
+              <a:buNone/>
+            </a:pPr>
+            <a:endParaRPr/>
+          </a:p>
+        </p:txBody>
+      </p:sp>
+      <p:pic>
+        <p:nvPicPr>
+          <p:cNvPr id="348" name="Google Shape;348;p37" descr="Statistica_powerpassports"/>
+          <p:cNvPicPr preferRelativeResize="0"/>
+          <p:nvPr/>
+        </p:nvPicPr>
+        <p:blipFill rotWithShape="1">
+          <a:blip r:embed="rId3">
+            <a:alphaModFix/>
+          </a:blip>
+          <a:srcRect/>
+          <a:stretch/>
+        </p:blipFill>
+        <p:spPr>
+          <a:xfrm>
+            <a:off x="179512" y="2838450"/>
+            <a:ext cx="4573088" cy="3240360"/>
+          </a:xfrm>
+          <a:prstGeom prst="rect">
+            <a:avLst/>
+          </a:prstGeom>
+          <a:noFill/>
+          <a:ln>
+            <a:noFill/>
+          </a:ln>
+        </p:spPr>
+      </p:pic>
+      <p:pic>
+        <p:nvPicPr>
+          <p:cNvPr id="349" name="Google Shape;349;p37" descr="Mc_cellphones_money17"/>
+          <p:cNvPicPr preferRelativeResize="0"/>
+          <p:nvPr/>
+        </p:nvPicPr>
+        <p:blipFill rotWithShape="1">
+          <a:blip r:embed="rId4">
+            <a:alphaModFix/>
+          </a:blip>
+          <a:srcRect/>
+          <a:stretch/>
+        </p:blipFill>
+        <p:spPr>
+          <a:xfrm>
+            <a:off x="4644008" y="1075150"/>
+            <a:ext cx="4320480" cy="3153950"/>
+          </a:xfrm>
+          <a:prstGeom prst="rect">
+            <a:avLst/>
+          </a:prstGeom>
+          <a:noFill/>
+          <a:ln>
+            <a:noFill/>
+          </a:ln>
+        </p:spPr>
+      </p:pic>
+    </p:spTree>
+  </p:cSld>
+  <p:clrMapOvr>
+    <a:masterClrMapping/>
+  </p:clrMapOvr>
+</p:sld>
+</file>
+
+<file path=ppt/slides/slide41.xml><?xml version="1.0" encoding="utf-8"?>
 <p:sld xmlns:a="http://schemas.openxmlformats.org/drawingml/2006/main" xmlns:r="http://schemas.openxmlformats.org/officeDocument/2006/relationships" xmlns:p="http://schemas.openxmlformats.org/presentationml/2006/main">
   <p:cSld>
     <p:spTree>
@@ -21122,7 +21536,7 @@
 </p:sld>
 </file>
 
-<file path=ppt/slides/slide41.xml><?xml version="1.0" encoding="utf-8"?>
+<file path=ppt/slides/slide42.xml><?xml version="1.0" encoding="utf-8"?>
 <p:sld xmlns:a="http://schemas.openxmlformats.org/drawingml/2006/main" xmlns:r="http://schemas.openxmlformats.org/officeDocument/2006/relationships" xmlns:p="http://schemas.openxmlformats.org/presentationml/2006/main">
   <p:cSld>
     <p:spTree>
